--- a/python/ex7/2412747_kadai7.pptx
+++ b/python/ex7/2412747_kadai7.pptx
@@ -6,6 +6,8 @@
   </p:sldMasterIdLst>
   <p:sldIdLst>
     <p:sldId id="257" r:id="rId2"/>
+    <p:sldId id="258" r:id="rId3"/>
+    <p:sldId id="259" r:id="rId4"/>
   </p:sldIdLst>
   <p:sldSz cx="12192000" cy="6858000"/>
   <p:notesSz cx="6858000" cy="9144000"/>
@@ -104,6 +106,11 @@
       </a:defRPr>
     </a:lvl9pPr>
   </p:defaultTextStyle>
+  <p:extLst>
+    <p:ext uri="{EFAFB233-063F-42B5-8137-9DF3F51BA10A}">
+      <p15:sldGuideLst xmlns:p15="http://schemas.microsoft.com/office/powerpoint/2012/main"/>
+    </p:ext>
+  </p:extLst>
 </p:presentation>
 </file>
 
@@ -3630,6 +3637,355 @@
           <a:bodyPr/>
           <a:lstStyle/>
           <a:p>
+            <a:pPr algn="ctr"/>
+            <a:r>
+              <a:rPr kumimoji="1" lang="ja-JP" altLang="en-US"/>
+              <a:t>アルゴリズム選定</a:t>
+            </a:r>
+          </a:p>
+        </p:txBody>
+      </p:sp>
+      <p:sp>
+        <p:nvSpPr>
+          <p:cNvPr id="3" name="正方形/長方形 2">
+            <a:extLst>
+              <a:ext uri="{FF2B5EF4-FFF2-40B4-BE49-F238E27FC236}">
+                <a16:creationId xmlns:a16="http://schemas.microsoft.com/office/drawing/2014/main" id="{A2F632A0-2008-BE59-05A7-08671DD80F32}"/>
+              </a:ext>
+            </a:extLst>
+          </p:cNvPr>
+          <p:cNvSpPr/>
+          <p:nvPr/>
+        </p:nvSpPr>
+        <p:spPr>
+          <a:xfrm>
+            <a:off x="191869" y="2008188"/>
+            <a:ext cx="3511550" cy="774700"/>
+          </a:xfrm>
+          <a:prstGeom prst="rect">
+            <a:avLst/>
+          </a:prstGeom>
+          <a:solidFill>
+            <a:schemeClr val="tx2">
+              <a:lumMod val="50000"/>
+              <a:lumOff val="50000"/>
+            </a:schemeClr>
+          </a:solidFill>
+        </p:spPr>
+        <p:style>
+          <a:lnRef idx="2">
+            <a:schemeClr val="accent1">
+              <a:shade val="15000"/>
+            </a:schemeClr>
+          </a:lnRef>
+          <a:fillRef idx="1">
+            <a:schemeClr val="accent1"/>
+          </a:fillRef>
+          <a:effectRef idx="0">
+            <a:schemeClr val="accent1"/>
+          </a:effectRef>
+          <a:fontRef idx="minor">
+            <a:schemeClr val="lt1"/>
+          </a:fontRef>
+        </p:style>
+        <p:txBody>
+          <a:bodyPr rtlCol="0" anchor="ctr"/>
+          <a:lstStyle/>
+          <a:p>
+            <a:pPr algn="ctr"/>
+            <a:r>
+              <a:rPr kumimoji="1" lang="ja-JP" altLang="en-US"/>
+              <a:t>混合正規分布に基づく</a:t>
+            </a:r>
+            <a:br>
+              <a:rPr kumimoji="1" lang="en-US" altLang="ja-JP" dirty="0"/>
+            </a:br>
+            <a:r>
+              <a:rPr kumimoji="1" lang="ja-JP" altLang="en-US"/>
+              <a:t>領域分割アルゴリズム</a:t>
+            </a:r>
+          </a:p>
+        </p:txBody>
+      </p:sp>
+      <p:sp>
+        <p:nvSpPr>
+          <p:cNvPr id="5" name="正方形/長方形 4">
+            <a:extLst>
+              <a:ext uri="{FF2B5EF4-FFF2-40B4-BE49-F238E27FC236}">
+                <a16:creationId xmlns:a16="http://schemas.microsoft.com/office/drawing/2014/main" id="{F3A5B27F-9F3C-2604-8669-267C4E9B90CE}"/>
+              </a:ext>
+            </a:extLst>
+          </p:cNvPr>
+          <p:cNvSpPr/>
+          <p:nvPr/>
+        </p:nvSpPr>
+        <p:spPr>
+          <a:xfrm>
+            <a:off x="4246344" y="2008188"/>
+            <a:ext cx="3511550" cy="774700"/>
+          </a:xfrm>
+          <a:prstGeom prst="rect">
+            <a:avLst/>
+          </a:prstGeom>
+          <a:solidFill>
+            <a:schemeClr val="tx2">
+              <a:lumMod val="50000"/>
+              <a:lumOff val="50000"/>
+            </a:schemeClr>
+          </a:solidFill>
+        </p:spPr>
+        <p:style>
+          <a:lnRef idx="2">
+            <a:schemeClr val="accent1">
+              <a:shade val="15000"/>
+            </a:schemeClr>
+          </a:lnRef>
+          <a:fillRef idx="1">
+            <a:schemeClr val="accent1"/>
+          </a:fillRef>
+          <a:effectRef idx="0">
+            <a:schemeClr val="accent1"/>
+          </a:effectRef>
+          <a:fontRef idx="minor">
+            <a:schemeClr val="lt1"/>
+          </a:fontRef>
+        </p:style>
+        <p:txBody>
+          <a:bodyPr rtlCol="0" anchor="ctr"/>
+          <a:lstStyle/>
+          <a:p>
+            <a:pPr algn="ctr"/>
+            <a:r>
+              <a:rPr kumimoji="1" lang="ja-JP" altLang="en-US"/>
+              <a:t>フレーム間差分の論理積</a:t>
+            </a:r>
+          </a:p>
+        </p:txBody>
+      </p:sp>
+      <p:sp>
+        <p:nvSpPr>
+          <p:cNvPr id="6" name="正方形/長方形 5">
+            <a:extLst>
+              <a:ext uri="{FF2B5EF4-FFF2-40B4-BE49-F238E27FC236}">
+                <a16:creationId xmlns:a16="http://schemas.microsoft.com/office/drawing/2014/main" id="{FF1BB390-4A34-F354-BDA0-0F1AA9FBC688}"/>
+              </a:ext>
+            </a:extLst>
+          </p:cNvPr>
+          <p:cNvSpPr/>
+          <p:nvPr/>
+        </p:nvSpPr>
+        <p:spPr>
+          <a:xfrm>
+            <a:off x="8291294" y="2008188"/>
+            <a:ext cx="3511550" cy="774700"/>
+          </a:xfrm>
+          <a:prstGeom prst="rect">
+            <a:avLst/>
+          </a:prstGeom>
+          <a:solidFill>
+            <a:schemeClr val="tx2">
+              <a:lumMod val="50000"/>
+              <a:lumOff val="50000"/>
+            </a:schemeClr>
+          </a:solidFill>
+        </p:spPr>
+        <p:style>
+          <a:lnRef idx="2">
+            <a:schemeClr val="accent1">
+              <a:shade val="15000"/>
+            </a:schemeClr>
+          </a:lnRef>
+          <a:fillRef idx="1">
+            <a:schemeClr val="accent1"/>
+          </a:fillRef>
+          <a:effectRef idx="0">
+            <a:schemeClr val="accent1"/>
+          </a:effectRef>
+          <a:fontRef idx="minor">
+            <a:schemeClr val="lt1"/>
+          </a:fontRef>
+        </p:style>
+        <p:txBody>
+          <a:bodyPr rtlCol="0" anchor="ctr"/>
+          <a:lstStyle/>
+          <a:p>
+            <a:pPr algn="ctr"/>
+            <a:r>
+              <a:rPr kumimoji="1" lang="en-US" altLang="ja-JP" dirty="0"/>
+              <a:t>K</a:t>
+            </a:r>
+            <a:r>
+              <a:rPr kumimoji="1" lang="ja-JP" altLang="en-US"/>
+              <a:t>近傍法に基づく</a:t>
+            </a:r>
+            <a:br>
+              <a:rPr kumimoji="1" lang="en-US" altLang="ja-JP" dirty="0"/>
+            </a:br>
+            <a:r>
+              <a:rPr kumimoji="1" lang="ja-JP" altLang="en-US"/>
+              <a:t>背景差分アルゴリズム</a:t>
+            </a:r>
+          </a:p>
+        </p:txBody>
+      </p:sp>
+      <p:sp>
+        <p:nvSpPr>
+          <p:cNvPr id="7" name="テキスト ボックス 6">
+            <a:extLst>
+              <a:ext uri="{FF2B5EF4-FFF2-40B4-BE49-F238E27FC236}">
+                <a16:creationId xmlns:a16="http://schemas.microsoft.com/office/drawing/2014/main" id="{808E71A2-28E0-A0DE-D4FA-6D0D74121D4A}"/>
+              </a:ext>
+            </a:extLst>
+          </p:cNvPr>
+          <p:cNvSpPr txBox="1"/>
+          <p:nvPr/>
+        </p:nvSpPr>
+        <p:spPr>
+          <a:xfrm>
+            <a:off x="11353800" y="2915722"/>
+            <a:ext cx="646331" cy="369332"/>
+          </a:xfrm>
+          <a:prstGeom prst="rect">
+            <a:avLst/>
+          </a:prstGeom>
+          <a:noFill/>
+        </p:spPr>
+        <p:txBody>
+          <a:bodyPr wrap="none" rtlCol="0">
+            <a:spAutoFit/>
+          </a:bodyPr>
+          <a:lstStyle/>
+          <a:p>
+            <a:r>
+              <a:rPr kumimoji="1" lang="ja-JP" altLang="en-US"/>
+              <a:t>など</a:t>
+            </a:r>
+          </a:p>
+        </p:txBody>
+      </p:sp>
+      <p:sp>
+        <p:nvSpPr>
+          <p:cNvPr id="14" name="テキスト ボックス 13">
+            <a:extLst>
+              <a:ext uri="{FF2B5EF4-FFF2-40B4-BE49-F238E27FC236}">
+                <a16:creationId xmlns:a16="http://schemas.microsoft.com/office/drawing/2014/main" id="{2CF08FDD-2CF1-D0C6-45C0-0FDD2A9E491B}"/>
+              </a:ext>
+            </a:extLst>
+          </p:cNvPr>
+          <p:cNvSpPr txBox="1"/>
+          <p:nvPr/>
+        </p:nvSpPr>
+        <p:spPr>
+          <a:xfrm>
+            <a:off x="0" y="4285516"/>
+            <a:ext cx="6032421" cy="830997"/>
+          </a:xfrm>
+          <a:prstGeom prst="rect">
+            <a:avLst/>
+          </a:prstGeom>
+          <a:noFill/>
+        </p:spPr>
+        <p:txBody>
+          <a:bodyPr wrap="none" rtlCol="0">
+            <a:spAutoFit/>
+          </a:bodyPr>
+          <a:lstStyle/>
+          <a:p>
+            <a:r>
+              <a:rPr kumimoji="1" lang="ja-JP" altLang="en-US" sz="2400"/>
+              <a:t>・自分で設計し調整できる</a:t>
+            </a:r>
+            <a:endParaRPr kumimoji="1" lang="en-US" altLang="ja-JP" sz="2400" dirty="0"/>
+          </a:p>
+          <a:p>
+            <a:r>
+              <a:rPr kumimoji="1" lang="ja-JP" altLang="en-US" sz="2400"/>
+              <a:t>・今回の動画は解像度が低くぼやけている</a:t>
+            </a:r>
+          </a:p>
+        </p:txBody>
+      </p:sp>
+      <p:sp>
+        <p:nvSpPr>
+          <p:cNvPr id="16" name="テキスト ボックス 15">
+            <a:extLst>
+              <a:ext uri="{FF2B5EF4-FFF2-40B4-BE49-F238E27FC236}">
+                <a16:creationId xmlns:a16="http://schemas.microsoft.com/office/drawing/2014/main" id="{045A0049-083E-4835-0B11-AD5C199C7AD8}"/>
+              </a:ext>
+            </a:extLst>
+          </p:cNvPr>
+          <p:cNvSpPr txBox="1"/>
+          <p:nvPr/>
+        </p:nvSpPr>
+        <p:spPr>
+          <a:xfrm>
+            <a:off x="6153993" y="3577630"/>
+            <a:ext cx="1723549" cy="707886"/>
+          </a:xfrm>
+          <a:prstGeom prst="rect">
+            <a:avLst/>
+          </a:prstGeom>
+          <a:noFill/>
+        </p:spPr>
+        <p:txBody>
+          <a:bodyPr wrap="none" rtlCol="0">
+            <a:spAutoFit/>
+          </a:bodyPr>
+          <a:lstStyle/>
+          <a:p>
+            <a:r>
+              <a:rPr kumimoji="1" lang="ja-JP" altLang="en-US" sz="4000">
+                <a:solidFill>
+                  <a:srgbClr val="FF0000"/>
+                </a:solidFill>
+              </a:rPr>
+              <a:t>最適！</a:t>
+            </a:r>
+          </a:p>
+        </p:txBody>
+      </p:sp>
+      <p:sp>
+        <p:nvSpPr>
+          <p:cNvPr id="17" name="下矢印 16">
+            <a:extLst>
+              <a:ext uri="{FF2B5EF4-FFF2-40B4-BE49-F238E27FC236}">
+                <a16:creationId xmlns:a16="http://schemas.microsoft.com/office/drawing/2014/main" id="{AF707280-E79A-4009-9B91-1B5D6C3C1887}"/>
+              </a:ext>
+            </a:extLst>
+          </p:cNvPr>
+          <p:cNvSpPr/>
+          <p:nvPr/>
+        </p:nvSpPr>
+        <p:spPr>
+          <a:xfrm rot="13086612">
+            <a:off x="5195328" y="2803262"/>
+            <a:ext cx="671131" cy="1716446"/>
+          </a:xfrm>
+          <a:prstGeom prst="downArrow">
+            <a:avLst/>
+          </a:prstGeom>
+        </p:spPr>
+        <p:style>
+          <a:lnRef idx="2">
+            <a:schemeClr val="accent1">
+              <a:shade val="15000"/>
+            </a:schemeClr>
+          </a:lnRef>
+          <a:fillRef idx="1">
+            <a:schemeClr val="accent1"/>
+          </a:fillRef>
+          <a:effectRef idx="0">
+            <a:schemeClr val="accent1"/>
+          </a:effectRef>
+          <a:fontRef idx="minor">
+            <a:schemeClr val="lt1"/>
+          </a:fontRef>
+        </p:style>
+        <p:txBody>
+          <a:bodyPr rtlCol="0" anchor="ctr"/>
+          <a:lstStyle/>
+          <a:p>
+            <a:pPr algn="ctr"/>
             <a:endParaRPr kumimoji="1" lang="ja-JP" altLang="en-US"/>
           </a:p>
         </p:txBody>
@@ -3638,6 +3994,974 @@
     <p:extLst>
       <p:ext uri="{BB962C8B-B14F-4D97-AF65-F5344CB8AC3E}">
         <p14:creationId xmlns:p14="http://schemas.microsoft.com/office/powerpoint/2010/main" val="2276130066"/>
+      </p:ext>
+    </p:extLst>
+  </p:cSld>
+  <p:clrMapOvr>
+    <a:masterClrMapping/>
+  </p:clrMapOvr>
+</p:sld>
+</file>
+
+<file path=ppt/slides/slide2.xml><?xml version="1.0" encoding="utf-8"?>
+<p:sld xmlns:a="http://schemas.openxmlformats.org/drawingml/2006/main" xmlns:r="http://schemas.openxmlformats.org/officeDocument/2006/relationships" xmlns:p="http://schemas.openxmlformats.org/presentationml/2006/main">
+  <p:cSld>
+    <p:spTree>
+      <p:nvGrpSpPr>
+        <p:cNvPr id="1" name=""/>
+        <p:cNvGrpSpPr/>
+        <p:nvPr/>
+      </p:nvGrpSpPr>
+      <p:grpSpPr>
+        <a:xfrm>
+          <a:off x="0" y="0"/>
+          <a:ext cx="0" cy="0"/>
+          <a:chOff x="0" y="0"/>
+          <a:chExt cx="0" cy="0"/>
+        </a:xfrm>
+      </p:grpSpPr>
+      <p:sp>
+        <p:nvSpPr>
+          <p:cNvPr id="2" name="タイトル 1">
+            <a:extLst>
+              <a:ext uri="{FF2B5EF4-FFF2-40B4-BE49-F238E27FC236}">
+                <a16:creationId xmlns:a16="http://schemas.microsoft.com/office/drawing/2014/main" id="{F76A1C13-8C2D-05D2-20C7-034C74CF41BB}"/>
+              </a:ext>
+            </a:extLst>
+          </p:cNvPr>
+          <p:cNvSpPr>
+            <a:spLocks noGrp="1"/>
+          </p:cNvSpPr>
+          <p:nvPr>
+            <p:ph type="title"/>
+          </p:nvPr>
+        </p:nvSpPr>
+        <p:spPr>
+          <a:xfrm>
+            <a:off x="838200" y="161925"/>
+            <a:ext cx="10515600" cy="1325563"/>
+          </a:xfrm>
+        </p:spPr>
+        <p:txBody>
+          <a:bodyPr/>
+          <a:lstStyle/>
+          <a:p>
+            <a:pPr algn="ctr"/>
+            <a:r>
+              <a:rPr kumimoji="1" lang="ja-JP" altLang="en-US"/>
+              <a:t>フレーム間差分</a:t>
+            </a:r>
+          </a:p>
+        </p:txBody>
+      </p:sp>
+      <p:sp>
+        <p:nvSpPr>
+          <p:cNvPr id="3" name="正方形/長方形 2">
+            <a:extLst>
+              <a:ext uri="{FF2B5EF4-FFF2-40B4-BE49-F238E27FC236}">
+                <a16:creationId xmlns:a16="http://schemas.microsoft.com/office/drawing/2014/main" id="{3A983410-121A-1D78-7366-688A92AA1A37}"/>
+              </a:ext>
+            </a:extLst>
+          </p:cNvPr>
+          <p:cNvSpPr/>
+          <p:nvPr/>
+        </p:nvSpPr>
+        <p:spPr>
+          <a:xfrm>
+            <a:off x="1093787" y="1574007"/>
+            <a:ext cx="3511550" cy="774700"/>
+          </a:xfrm>
+          <a:prstGeom prst="rect">
+            <a:avLst/>
+          </a:prstGeom>
+          <a:solidFill>
+            <a:schemeClr val="tx2">
+              <a:lumMod val="50000"/>
+              <a:lumOff val="50000"/>
+            </a:schemeClr>
+          </a:solidFill>
+        </p:spPr>
+        <p:style>
+          <a:lnRef idx="2">
+            <a:schemeClr val="accent1">
+              <a:shade val="15000"/>
+            </a:schemeClr>
+          </a:lnRef>
+          <a:fillRef idx="1">
+            <a:schemeClr val="accent1"/>
+          </a:fillRef>
+          <a:effectRef idx="0">
+            <a:schemeClr val="accent1"/>
+          </a:effectRef>
+          <a:fontRef idx="minor">
+            <a:schemeClr val="lt1"/>
+          </a:fontRef>
+        </p:style>
+        <p:txBody>
+          <a:bodyPr rtlCol="0" anchor="ctr"/>
+          <a:lstStyle/>
+          <a:p>
+            <a:pPr algn="ctr"/>
+            <a:r>
+              <a:rPr kumimoji="1" lang="en-US" altLang="ja-JP" dirty="0"/>
+              <a:t>3</a:t>
+            </a:r>
+            <a:r>
+              <a:rPr kumimoji="1" lang="ja-JP" altLang="en-US"/>
+              <a:t>フレームの画像をとる</a:t>
+            </a:r>
+          </a:p>
+        </p:txBody>
+      </p:sp>
+      <p:cxnSp>
+        <p:nvCxnSpPr>
+          <p:cNvPr id="5" name="直線矢印コネクタ 4">
+            <a:extLst>
+              <a:ext uri="{FF2B5EF4-FFF2-40B4-BE49-F238E27FC236}">
+                <a16:creationId xmlns:a16="http://schemas.microsoft.com/office/drawing/2014/main" id="{D0760420-F231-E350-015C-FF276EFA9023}"/>
+              </a:ext>
+            </a:extLst>
+          </p:cNvPr>
+          <p:cNvCxnSpPr>
+            <a:cxnSpLocks/>
+            <a:stCxn id="3" idx="3"/>
+            <a:endCxn id="6" idx="1"/>
+          </p:cNvCxnSpPr>
+          <p:nvPr/>
+        </p:nvCxnSpPr>
+        <p:spPr>
+          <a:xfrm>
+            <a:off x="4605337" y="1961357"/>
+            <a:ext cx="2981326" cy="0"/>
+          </a:xfrm>
+          <a:prstGeom prst="straightConnector1">
+            <a:avLst/>
+          </a:prstGeom>
+          <a:ln>
+            <a:tailEnd type="triangle"/>
+          </a:ln>
+        </p:spPr>
+        <p:style>
+          <a:lnRef idx="2">
+            <a:schemeClr val="accent1"/>
+          </a:lnRef>
+          <a:fillRef idx="0">
+            <a:schemeClr val="accent1"/>
+          </a:fillRef>
+          <a:effectRef idx="1">
+            <a:schemeClr val="accent1"/>
+          </a:effectRef>
+          <a:fontRef idx="minor">
+            <a:schemeClr val="tx1"/>
+          </a:fontRef>
+        </p:style>
+      </p:cxnSp>
+      <p:sp>
+        <p:nvSpPr>
+          <p:cNvPr id="6" name="正方形/長方形 5">
+            <a:extLst>
+              <a:ext uri="{FF2B5EF4-FFF2-40B4-BE49-F238E27FC236}">
+                <a16:creationId xmlns:a16="http://schemas.microsoft.com/office/drawing/2014/main" id="{0AF3D526-9760-571A-613F-490470B28074}"/>
+              </a:ext>
+            </a:extLst>
+          </p:cNvPr>
+          <p:cNvSpPr/>
+          <p:nvPr/>
+        </p:nvSpPr>
+        <p:spPr>
+          <a:xfrm>
+            <a:off x="7586663" y="1574007"/>
+            <a:ext cx="3511550" cy="774700"/>
+          </a:xfrm>
+          <a:prstGeom prst="rect">
+            <a:avLst/>
+          </a:prstGeom>
+          <a:solidFill>
+            <a:schemeClr val="tx2">
+              <a:lumMod val="50000"/>
+              <a:lumOff val="50000"/>
+            </a:schemeClr>
+          </a:solidFill>
+        </p:spPr>
+        <p:style>
+          <a:lnRef idx="2">
+            <a:schemeClr val="accent1">
+              <a:shade val="15000"/>
+            </a:schemeClr>
+          </a:lnRef>
+          <a:fillRef idx="1">
+            <a:schemeClr val="accent1"/>
+          </a:fillRef>
+          <a:effectRef idx="0">
+            <a:schemeClr val="accent1"/>
+          </a:effectRef>
+          <a:fontRef idx="minor">
+            <a:schemeClr val="lt1"/>
+          </a:fontRef>
+        </p:style>
+        <p:txBody>
+          <a:bodyPr rtlCol="0" anchor="ctr"/>
+          <a:lstStyle/>
+          <a:p>
+            <a:pPr algn="ctr"/>
+            <a:r>
+              <a:rPr kumimoji="1" lang="en-US" altLang="ja-JP" dirty="0"/>
+              <a:t>2</a:t>
+            </a:r>
+            <a:r>
+              <a:rPr kumimoji="1" lang="ja-JP" altLang="en-US"/>
+              <a:t>つの差分をとる</a:t>
+            </a:r>
+          </a:p>
+        </p:txBody>
+      </p:sp>
+      <p:sp>
+        <p:nvSpPr>
+          <p:cNvPr id="7" name="正方形/長方形 6">
+            <a:extLst>
+              <a:ext uri="{FF2B5EF4-FFF2-40B4-BE49-F238E27FC236}">
+                <a16:creationId xmlns:a16="http://schemas.microsoft.com/office/drawing/2014/main" id="{7D2A30B0-1F8A-CEE7-AAB5-E747FB3F98FB}"/>
+              </a:ext>
+            </a:extLst>
+          </p:cNvPr>
+          <p:cNvSpPr/>
+          <p:nvPr/>
+        </p:nvSpPr>
+        <p:spPr>
+          <a:xfrm>
+            <a:off x="1093787" y="2736057"/>
+            <a:ext cx="3511550" cy="774700"/>
+          </a:xfrm>
+          <a:prstGeom prst="rect">
+            <a:avLst/>
+          </a:prstGeom>
+          <a:solidFill>
+            <a:schemeClr val="tx2">
+              <a:lumMod val="50000"/>
+              <a:lumOff val="50000"/>
+            </a:schemeClr>
+          </a:solidFill>
+        </p:spPr>
+        <p:style>
+          <a:lnRef idx="2">
+            <a:schemeClr val="accent1">
+              <a:shade val="15000"/>
+            </a:schemeClr>
+          </a:lnRef>
+          <a:fillRef idx="1">
+            <a:schemeClr val="accent1"/>
+          </a:fillRef>
+          <a:effectRef idx="0">
+            <a:schemeClr val="accent1"/>
+          </a:effectRef>
+          <a:fontRef idx="minor">
+            <a:schemeClr val="lt1"/>
+          </a:fontRef>
+        </p:style>
+        <p:txBody>
+          <a:bodyPr rtlCol="0" anchor="ctr"/>
+          <a:lstStyle/>
+          <a:p>
+            <a:pPr algn="ctr"/>
+            <a:r>
+              <a:rPr kumimoji="1" lang="en-US" altLang="ja-JP" dirty="0"/>
+              <a:t>2</a:t>
+            </a:r>
+            <a:r>
+              <a:rPr kumimoji="1" lang="ja-JP" altLang="en-US"/>
+              <a:t>つの差分から論理積差分を出す</a:t>
+            </a:r>
+          </a:p>
+        </p:txBody>
+      </p:sp>
+      <p:cxnSp>
+        <p:nvCxnSpPr>
+          <p:cNvPr id="10" name="直線矢印コネクタ 9">
+            <a:extLst>
+              <a:ext uri="{FF2B5EF4-FFF2-40B4-BE49-F238E27FC236}">
+                <a16:creationId xmlns:a16="http://schemas.microsoft.com/office/drawing/2014/main" id="{623231B7-E657-789D-B77B-560E93B64246}"/>
+              </a:ext>
+            </a:extLst>
+          </p:cNvPr>
+          <p:cNvCxnSpPr>
+            <a:cxnSpLocks/>
+          </p:cNvCxnSpPr>
+          <p:nvPr/>
+        </p:nvCxnSpPr>
+        <p:spPr>
+          <a:xfrm>
+            <a:off x="11098213" y="1961357"/>
+            <a:ext cx="738187" cy="0"/>
+          </a:xfrm>
+          <a:prstGeom prst="straightConnector1">
+            <a:avLst/>
+          </a:prstGeom>
+          <a:ln>
+            <a:tailEnd type="triangle"/>
+          </a:ln>
+        </p:spPr>
+        <p:style>
+          <a:lnRef idx="2">
+            <a:schemeClr val="accent1"/>
+          </a:lnRef>
+          <a:fillRef idx="0">
+            <a:schemeClr val="accent1"/>
+          </a:fillRef>
+          <a:effectRef idx="1">
+            <a:schemeClr val="accent1"/>
+          </a:effectRef>
+          <a:fontRef idx="minor">
+            <a:schemeClr val="tx1"/>
+          </a:fontRef>
+        </p:style>
+      </p:cxnSp>
+      <p:cxnSp>
+        <p:nvCxnSpPr>
+          <p:cNvPr id="13" name="直線矢印コネクタ 12">
+            <a:extLst>
+              <a:ext uri="{FF2B5EF4-FFF2-40B4-BE49-F238E27FC236}">
+                <a16:creationId xmlns:a16="http://schemas.microsoft.com/office/drawing/2014/main" id="{FAC69650-6D62-86C8-F199-305B7173ADF9}"/>
+              </a:ext>
+            </a:extLst>
+          </p:cNvPr>
+          <p:cNvCxnSpPr>
+            <a:cxnSpLocks/>
+          </p:cNvCxnSpPr>
+          <p:nvPr/>
+        </p:nvCxnSpPr>
+        <p:spPr>
+          <a:xfrm>
+            <a:off x="355600" y="3136107"/>
+            <a:ext cx="738187" cy="0"/>
+          </a:xfrm>
+          <a:prstGeom prst="straightConnector1">
+            <a:avLst/>
+          </a:prstGeom>
+          <a:ln>
+            <a:tailEnd type="triangle"/>
+          </a:ln>
+        </p:spPr>
+        <p:style>
+          <a:lnRef idx="2">
+            <a:schemeClr val="accent1"/>
+          </a:lnRef>
+          <a:fillRef idx="0">
+            <a:schemeClr val="accent1"/>
+          </a:fillRef>
+          <a:effectRef idx="1">
+            <a:schemeClr val="accent1"/>
+          </a:effectRef>
+          <a:fontRef idx="minor">
+            <a:schemeClr val="tx1"/>
+          </a:fontRef>
+        </p:style>
+      </p:cxnSp>
+      <p:cxnSp>
+        <p:nvCxnSpPr>
+          <p:cNvPr id="14" name="直線矢印コネクタ 13">
+            <a:extLst>
+              <a:ext uri="{FF2B5EF4-FFF2-40B4-BE49-F238E27FC236}">
+                <a16:creationId xmlns:a16="http://schemas.microsoft.com/office/drawing/2014/main" id="{D2A7BB73-DE2B-F21E-7FAB-67A6CCB7D479}"/>
+              </a:ext>
+            </a:extLst>
+          </p:cNvPr>
+          <p:cNvCxnSpPr>
+            <a:cxnSpLocks/>
+          </p:cNvCxnSpPr>
+          <p:nvPr/>
+        </p:nvCxnSpPr>
+        <p:spPr>
+          <a:xfrm>
+            <a:off x="4618037" y="3136107"/>
+            <a:ext cx="2981326" cy="0"/>
+          </a:xfrm>
+          <a:prstGeom prst="straightConnector1">
+            <a:avLst/>
+          </a:prstGeom>
+          <a:ln>
+            <a:tailEnd type="triangle"/>
+          </a:ln>
+        </p:spPr>
+        <p:style>
+          <a:lnRef idx="2">
+            <a:schemeClr val="accent1"/>
+          </a:lnRef>
+          <a:fillRef idx="0">
+            <a:schemeClr val="accent1"/>
+          </a:fillRef>
+          <a:effectRef idx="1">
+            <a:schemeClr val="accent1"/>
+          </a:effectRef>
+          <a:fontRef idx="minor">
+            <a:schemeClr val="tx1"/>
+          </a:fontRef>
+        </p:style>
+      </p:cxnSp>
+      <p:sp>
+        <p:nvSpPr>
+          <p:cNvPr id="15" name="正方形/長方形 14">
+            <a:extLst>
+              <a:ext uri="{FF2B5EF4-FFF2-40B4-BE49-F238E27FC236}">
+                <a16:creationId xmlns:a16="http://schemas.microsoft.com/office/drawing/2014/main" id="{B7869D0D-2E95-94AB-9503-943D79362FD0}"/>
+              </a:ext>
+            </a:extLst>
+          </p:cNvPr>
+          <p:cNvSpPr/>
+          <p:nvPr/>
+        </p:nvSpPr>
+        <p:spPr>
+          <a:xfrm>
+            <a:off x="7612063" y="2748757"/>
+            <a:ext cx="3511550" cy="774700"/>
+          </a:xfrm>
+          <a:prstGeom prst="rect">
+            <a:avLst/>
+          </a:prstGeom>
+          <a:solidFill>
+            <a:schemeClr val="tx2">
+              <a:lumMod val="50000"/>
+              <a:lumOff val="50000"/>
+            </a:schemeClr>
+          </a:solidFill>
+        </p:spPr>
+        <p:style>
+          <a:lnRef idx="2">
+            <a:schemeClr val="accent1">
+              <a:shade val="15000"/>
+            </a:schemeClr>
+          </a:lnRef>
+          <a:fillRef idx="1">
+            <a:schemeClr val="accent1"/>
+          </a:fillRef>
+          <a:effectRef idx="0">
+            <a:schemeClr val="accent1"/>
+          </a:effectRef>
+          <a:fontRef idx="minor">
+            <a:schemeClr val="lt1"/>
+          </a:fontRef>
+        </p:style>
+        <p:txBody>
+          <a:bodyPr rtlCol="0" anchor="ctr"/>
+          <a:lstStyle/>
+          <a:p>
+            <a:pPr algn="ctr"/>
+            <a:r>
+              <a:rPr kumimoji="1" lang="en-US" altLang="ja-JP" dirty="0"/>
+              <a:t>2</a:t>
+            </a:r>
+            <a:r>
+              <a:rPr kumimoji="1" lang="ja-JP" altLang="en-US"/>
+              <a:t>つの差分をとる</a:t>
+            </a:r>
+          </a:p>
+        </p:txBody>
+      </p:sp>
+      <p:sp>
+        <p:nvSpPr>
+          <p:cNvPr id="16" name="正方形/長方形 15">
+            <a:extLst>
+              <a:ext uri="{FF2B5EF4-FFF2-40B4-BE49-F238E27FC236}">
+                <a16:creationId xmlns:a16="http://schemas.microsoft.com/office/drawing/2014/main" id="{59E79FF8-AB7C-05FE-91F8-D4A61C18C457}"/>
+              </a:ext>
+            </a:extLst>
+          </p:cNvPr>
+          <p:cNvSpPr/>
+          <p:nvPr/>
+        </p:nvSpPr>
+        <p:spPr>
+          <a:xfrm>
+            <a:off x="1093787" y="3923507"/>
+            <a:ext cx="3511550" cy="774700"/>
+          </a:xfrm>
+          <a:prstGeom prst="rect">
+            <a:avLst/>
+          </a:prstGeom>
+          <a:solidFill>
+            <a:schemeClr val="tx2">
+              <a:lumMod val="50000"/>
+              <a:lumOff val="50000"/>
+            </a:schemeClr>
+          </a:solidFill>
+        </p:spPr>
+        <p:style>
+          <a:lnRef idx="2">
+            <a:schemeClr val="accent1">
+              <a:shade val="15000"/>
+            </a:schemeClr>
+          </a:lnRef>
+          <a:fillRef idx="1">
+            <a:schemeClr val="accent1"/>
+          </a:fillRef>
+          <a:effectRef idx="0">
+            <a:schemeClr val="accent1"/>
+          </a:effectRef>
+          <a:fontRef idx="minor">
+            <a:schemeClr val="lt1"/>
+          </a:fontRef>
+        </p:style>
+        <p:txBody>
+          <a:bodyPr rtlCol="0" anchor="ctr"/>
+          <a:lstStyle/>
+          <a:p>
+            <a:pPr algn="ctr"/>
+            <a:r>
+              <a:rPr kumimoji="1" lang="en-US" altLang="ja-JP" dirty="0"/>
+              <a:t>2</a:t>
+            </a:r>
+            <a:r>
+              <a:rPr kumimoji="1" lang="ja-JP" altLang="en-US"/>
+              <a:t>値化してハイライト</a:t>
+            </a:r>
+          </a:p>
+        </p:txBody>
+      </p:sp>
+      <p:sp>
+        <p:nvSpPr>
+          <p:cNvPr id="17" name="正方形/長方形 16">
+            <a:extLst>
+              <a:ext uri="{FF2B5EF4-FFF2-40B4-BE49-F238E27FC236}">
+                <a16:creationId xmlns:a16="http://schemas.microsoft.com/office/drawing/2014/main" id="{65935EC3-EDB2-0A46-F283-87A24BCB958A}"/>
+              </a:ext>
+            </a:extLst>
+          </p:cNvPr>
+          <p:cNvSpPr/>
+          <p:nvPr/>
+        </p:nvSpPr>
+        <p:spPr>
+          <a:xfrm>
+            <a:off x="7612063" y="3923507"/>
+            <a:ext cx="3511550" cy="774700"/>
+          </a:xfrm>
+          <a:prstGeom prst="rect">
+            <a:avLst/>
+          </a:prstGeom>
+          <a:solidFill>
+            <a:schemeClr val="tx2">
+              <a:lumMod val="50000"/>
+              <a:lumOff val="50000"/>
+            </a:schemeClr>
+          </a:solidFill>
+        </p:spPr>
+        <p:style>
+          <a:lnRef idx="2">
+            <a:schemeClr val="accent1">
+              <a:shade val="15000"/>
+            </a:schemeClr>
+          </a:lnRef>
+          <a:fillRef idx="1">
+            <a:schemeClr val="accent1"/>
+          </a:fillRef>
+          <a:effectRef idx="0">
+            <a:schemeClr val="accent1"/>
+          </a:effectRef>
+          <a:fontRef idx="minor">
+            <a:schemeClr val="lt1"/>
+          </a:fontRef>
+        </p:style>
+        <p:txBody>
+          <a:bodyPr rtlCol="0" anchor="ctr"/>
+          <a:lstStyle/>
+          <a:p>
+            <a:pPr algn="ctr"/>
+            <a:r>
+              <a:rPr kumimoji="1" lang="ja-JP" altLang="en-US"/>
+              <a:t>フィルターをかけて整備</a:t>
+            </a:r>
+          </a:p>
+        </p:txBody>
+      </p:sp>
+      <p:cxnSp>
+        <p:nvCxnSpPr>
+          <p:cNvPr id="18" name="直線矢印コネクタ 17">
+            <a:extLst>
+              <a:ext uri="{FF2B5EF4-FFF2-40B4-BE49-F238E27FC236}">
+                <a16:creationId xmlns:a16="http://schemas.microsoft.com/office/drawing/2014/main" id="{D9F285B9-FAB7-A21D-CD7A-9E8D35ED3101}"/>
+              </a:ext>
+            </a:extLst>
+          </p:cNvPr>
+          <p:cNvCxnSpPr>
+            <a:cxnSpLocks/>
+          </p:cNvCxnSpPr>
+          <p:nvPr/>
+        </p:nvCxnSpPr>
+        <p:spPr>
+          <a:xfrm>
+            <a:off x="4605337" y="4310857"/>
+            <a:ext cx="2981326" cy="0"/>
+          </a:xfrm>
+          <a:prstGeom prst="straightConnector1">
+            <a:avLst/>
+          </a:prstGeom>
+          <a:ln>
+            <a:tailEnd type="triangle"/>
+          </a:ln>
+        </p:spPr>
+        <p:style>
+          <a:lnRef idx="2">
+            <a:schemeClr val="accent1"/>
+          </a:lnRef>
+          <a:fillRef idx="0">
+            <a:schemeClr val="accent1"/>
+          </a:fillRef>
+          <a:effectRef idx="1">
+            <a:schemeClr val="accent1"/>
+          </a:effectRef>
+          <a:fontRef idx="minor">
+            <a:schemeClr val="tx1"/>
+          </a:fontRef>
+        </p:style>
+      </p:cxnSp>
+      <p:cxnSp>
+        <p:nvCxnSpPr>
+          <p:cNvPr id="19" name="直線矢印コネクタ 18">
+            <a:extLst>
+              <a:ext uri="{FF2B5EF4-FFF2-40B4-BE49-F238E27FC236}">
+                <a16:creationId xmlns:a16="http://schemas.microsoft.com/office/drawing/2014/main" id="{E31CAA13-3F3E-4F66-6EEC-6FBC5F2BE6F5}"/>
+              </a:ext>
+            </a:extLst>
+          </p:cNvPr>
+          <p:cNvCxnSpPr>
+            <a:cxnSpLocks/>
+          </p:cNvCxnSpPr>
+          <p:nvPr/>
+        </p:nvCxnSpPr>
+        <p:spPr>
+          <a:xfrm>
+            <a:off x="355600" y="4310857"/>
+            <a:ext cx="738187" cy="0"/>
+          </a:xfrm>
+          <a:prstGeom prst="straightConnector1">
+            <a:avLst/>
+          </a:prstGeom>
+          <a:ln>
+            <a:tailEnd type="triangle"/>
+          </a:ln>
+        </p:spPr>
+        <p:style>
+          <a:lnRef idx="2">
+            <a:schemeClr val="accent1"/>
+          </a:lnRef>
+          <a:fillRef idx="0">
+            <a:schemeClr val="accent1"/>
+          </a:fillRef>
+          <a:effectRef idx="1">
+            <a:schemeClr val="accent1"/>
+          </a:effectRef>
+          <a:fontRef idx="minor">
+            <a:schemeClr val="tx1"/>
+          </a:fontRef>
+        </p:style>
+      </p:cxnSp>
+      <p:cxnSp>
+        <p:nvCxnSpPr>
+          <p:cNvPr id="20" name="直線矢印コネクタ 19">
+            <a:extLst>
+              <a:ext uri="{FF2B5EF4-FFF2-40B4-BE49-F238E27FC236}">
+                <a16:creationId xmlns:a16="http://schemas.microsoft.com/office/drawing/2014/main" id="{AE7F7D0F-0722-91F8-C766-6CF4A1330CAB}"/>
+              </a:ext>
+            </a:extLst>
+          </p:cNvPr>
+          <p:cNvCxnSpPr>
+            <a:cxnSpLocks/>
+          </p:cNvCxnSpPr>
+          <p:nvPr/>
+        </p:nvCxnSpPr>
+        <p:spPr>
+          <a:xfrm>
+            <a:off x="11123613" y="3123407"/>
+            <a:ext cx="738187" cy="0"/>
+          </a:xfrm>
+          <a:prstGeom prst="straightConnector1">
+            <a:avLst/>
+          </a:prstGeom>
+          <a:ln>
+            <a:tailEnd type="triangle"/>
+          </a:ln>
+        </p:spPr>
+        <p:style>
+          <a:lnRef idx="2">
+            <a:schemeClr val="accent1"/>
+          </a:lnRef>
+          <a:fillRef idx="0">
+            <a:schemeClr val="accent1"/>
+          </a:fillRef>
+          <a:effectRef idx="1">
+            <a:schemeClr val="accent1"/>
+          </a:effectRef>
+          <a:fontRef idx="minor">
+            <a:schemeClr val="tx1"/>
+          </a:fontRef>
+        </p:style>
+      </p:cxnSp>
+      <p:sp>
+        <p:nvSpPr>
+          <p:cNvPr id="21" name="フローチャート: 結合子 20">
+            <a:extLst>
+              <a:ext uri="{FF2B5EF4-FFF2-40B4-BE49-F238E27FC236}">
+                <a16:creationId xmlns:a16="http://schemas.microsoft.com/office/drawing/2014/main" id="{5214DD6F-AB15-8D94-CED5-0982298FF892}"/>
+              </a:ext>
+            </a:extLst>
+          </p:cNvPr>
+          <p:cNvSpPr/>
+          <p:nvPr/>
+        </p:nvSpPr>
+        <p:spPr>
+          <a:xfrm>
+            <a:off x="4178300" y="5061352"/>
+            <a:ext cx="3835400" cy="1597807"/>
+          </a:xfrm>
+          <a:prstGeom prst="flowChartConnector">
+            <a:avLst/>
+          </a:prstGeom>
+          <a:solidFill>
+            <a:srgbClr val="FE0037"/>
+          </a:solidFill>
+        </p:spPr>
+        <p:style>
+          <a:lnRef idx="2">
+            <a:schemeClr val="accent1">
+              <a:shade val="15000"/>
+            </a:schemeClr>
+          </a:lnRef>
+          <a:fillRef idx="1">
+            <a:schemeClr val="accent1"/>
+          </a:fillRef>
+          <a:effectRef idx="0">
+            <a:schemeClr val="accent1"/>
+          </a:effectRef>
+          <a:fontRef idx="minor">
+            <a:schemeClr val="lt1"/>
+          </a:fontRef>
+        </p:style>
+        <p:txBody>
+          <a:bodyPr rtlCol="0" anchor="ctr"/>
+          <a:lstStyle/>
+          <a:p>
+            <a:pPr algn="ctr"/>
+            <a:r>
+              <a:rPr kumimoji="1" lang="ja-JP" altLang="en-US" sz="2400"/>
+              <a:t>動いている部分が検出できた！</a:t>
+            </a:r>
+          </a:p>
+        </p:txBody>
+      </p:sp>
+      <p:cxnSp>
+        <p:nvCxnSpPr>
+          <p:cNvPr id="22" name="直線矢印コネクタ 21">
+            <a:extLst>
+              <a:ext uri="{FF2B5EF4-FFF2-40B4-BE49-F238E27FC236}">
+                <a16:creationId xmlns:a16="http://schemas.microsoft.com/office/drawing/2014/main" id="{E07B029C-14E7-B8BF-8D33-B2FC473AA132}"/>
+              </a:ext>
+            </a:extLst>
+          </p:cNvPr>
+          <p:cNvCxnSpPr>
+            <a:cxnSpLocks/>
+          </p:cNvCxnSpPr>
+          <p:nvPr/>
+        </p:nvCxnSpPr>
+        <p:spPr>
+          <a:xfrm>
+            <a:off x="355600" y="5860255"/>
+            <a:ext cx="3822700" cy="0"/>
+          </a:xfrm>
+          <a:prstGeom prst="straightConnector1">
+            <a:avLst/>
+          </a:prstGeom>
+          <a:ln>
+            <a:tailEnd type="triangle"/>
+          </a:ln>
+        </p:spPr>
+        <p:style>
+          <a:lnRef idx="2">
+            <a:schemeClr val="accent1"/>
+          </a:lnRef>
+          <a:fillRef idx="0">
+            <a:schemeClr val="accent1"/>
+          </a:fillRef>
+          <a:effectRef idx="1">
+            <a:schemeClr val="accent1"/>
+          </a:effectRef>
+          <a:fontRef idx="minor">
+            <a:schemeClr val="tx1"/>
+          </a:fontRef>
+        </p:style>
+      </p:cxnSp>
+      <p:cxnSp>
+        <p:nvCxnSpPr>
+          <p:cNvPr id="24" name="直線矢印コネクタ 23">
+            <a:extLst>
+              <a:ext uri="{FF2B5EF4-FFF2-40B4-BE49-F238E27FC236}">
+                <a16:creationId xmlns:a16="http://schemas.microsoft.com/office/drawing/2014/main" id="{5E371B4F-D80E-48CC-DBD8-312053A5D6A7}"/>
+              </a:ext>
+            </a:extLst>
+          </p:cNvPr>
+          <p:cNvCxnSpPr>
+            <a:cxnSpLocks/>
+          </p:cNvCxnSpPr>
+          <p:nvPr/>
+        </p:nvCxnSpPr>
+        <p:spPr>
+          <a:xfrm>
+            <a:off x="11160919" y="4310064"/>
+            <a:ext cx="738187" cy="0"/>
+          </a:xfrm>
+          <a:prstGeom prst="straightConnector1">
+            <a:avLst/>
+          </a:prstGeom>
+          <a:ln>
+            <a:tailEnd type="triangle"/>
+          </a:ln>
+        </p:spPr>
+        <p:style>
+          <a:lnRef idx="2">
+            <a:schemeClr val="accent1"/>
+          </a:lnRef>
+          <a:fillRef idx="0">
+            <a:schemeClr val="accent1"/>
+          </a:fillRef>
+          <a:effectRef idx="1">
+            <a:schemeClr val="accent1"/>
+          </a:effectRef>
+          <a:fontRef idx="minor">
+            <a:schemeClr val="tx1"/>
+          </a:fontRef>
+        </p:style>
+      </p:cxnSp>
+    </p:spTree>
+    <p:extLst>
+      <p:ext uri="{BB962C8B-B14F-4D97-AF65-F5344CB8AC3E}">
+        <p14:creationId xmlns:p14="http://schemas.microsoft.com/office/powerpoint/2010/main" val="345872074"/>
+      </p:ext>
+    </p:extLst>
+  </p:cSld>
+  <p:clrMapOvr>
+    <a:masterClrMapping/>
+  </p:clrMapOvr>
+</p:sld>
+</file>
+
+<file path=ppt/slides/slide3.xml><?xml version="1.0" encoding="utf-8"?>
+<p:sld xmlns:a="http://schemas.openxmlformats.org/drawingml/2006/main" xmlns:r="http://schemas.openxmlformats.org/officeDocument/2006/relationships" xmlns:p="http://schemas.openxmlformats.org/presentationml/2006/main">
+  <p:cSld>
+    <p:spTree>
+      <p:nvGrpSpPr>
+        <p:cNvPr id="1" name=""/>
+        <p:cNvGrpSpPr/>
+        <p:nvPr/>
+      </p:nvGrpSpPr>
+      <p:grpSpPr>
+        <a:xfrm>
+          <a:off x="0" y="0"/>
+          <a:ext cx="0" cy="0"/>
+          <a:chOff x="0" y="0"/>
+          <a:chExt cx="0" cy="0"/>
+        </a:xfrm>
+      </p:grpSpPr>
+      <p:sp>
+        <p:nvSpPr>
+          <p:cNvPr id="2" name="タイトル 1">
+            <a:extLst>
+              <a:ext uri="{FF2B5EF4-FFF2-40B4-BE49-F238E27FC236}">
+                <a16:creationId xmlns:a16="http://schemas.microsoft.com/office/drawing/2014/main" id="{4D6AE11D-B232-DC44-12E8-B8180599F665}"/>
+              </a:ext>
+            </a:extLst>
+          </p:cNvPr>
+          <p:cNvSpPr>
+            <a:spLocks noGrp="1"/>
+          </p:cNvSpPr>
+          <p:nvPr>
+            <p:ph type="title"/>
+          </p:nvPr>
+        </p:nvSpPr>
+        <p:spPr/>
+        <p:txBody>
+          <a:bodyPr/>
+          <a:lstStyle/>
+          <a:p>
+            <a:pPr algn="ctr"/>
+            <a:r>
+              <a:rPr kumimoji="1" lang="ja-JP" altLang="en-US"/>
+              <a:t>動きの追跡</a:t>
+            </a:r>
+          </a:p>
+        </p:txBody>
+      </p:sp>
+      <p:sp>
+        <p:nvSpPr>
+          <p:cNvPr id="3" name="雲 2">
+            <a:extLst>
+              <a:ext uri="{FF2B5EF4-FFF2-40B4-BE49-F238E27FC236}">
+                <a16:creationId xmlns:a16="http://schemas.microsoft.com/office/drawing/2014/main" id="{15CF1704-8703-F008-5C39-DC2CF554231A}"/>
+              </a:ext>
+            </a:extLst>
+          </p:cNvPr>
+          <p:cNvSpPr/>
+          <p:nvPr/>
+        </p:nvSpPr>
+        <p:spPr>
+          <a:xfrm>
+            <a:off x="838200" y="1485900"/>
+            <a:ext cx="3365500" cy="1325563"/>
+          </a:xfrm>
+          <a:prstGeom prst="cloud">
+            <a:avLst/>
+          </a:prstGeom>
+          <a:solidFill>
+            <a:schemeClr val="tx2">
+              <a:lumMod val="10000"/>
+              <a:lumOff val="90000"/>
+            </a:schemeClr>
+          </a:solidFill>
+        </p:spPr>
+        <p:style>
+          <a:lnRef idx="2">
+            <a:schemeClr val="accent1">
+              <a:shade val="15000"/>
+            </a:schemeClr>
+          </a:lnRef>
+          <a:fillRef idx="1">
+            <a:schemeClr val="accent1"/>
+          </a:fillRef>
+          <a:effectRef idx="0">
+            <a:schemeClr val="accent1"/>
+          </a:effectRef>
+          <a:fontRef idx="minor">
+            <a:schemeClr val="lt1"/>
+          </a:fontRef>
+        </p:style>
+        <p:txBody>
+          <a:bodyPr rtlCol="0" anchor="ctr"/>
+          <a:lstStyle/>
+          <a:p>
+            <a:pPr algn="ctr"/>
+            <a:r>
+              <a:rPr kumimoji="1" lang="ja-JP" altLang="en-US">
+                <a:solidFill>
+                  <a:sysClr val="windowText" lastClr="000000"/>
+                </a:solidFill>
+              </a:rPr>
+              <a:t>動いているものを全部追うのは大変</a:t>
+            </a:r>
+            <a:r>
+              <a:rPr lang="en-US" altLang="ja-JP" dirty="0">
+                <a:solidFill>
+                  <a:sysClr val="windowText" lastClr="000000"/>
+                </a:solidFill>
+              </a:rPr>
+              <a:t>...</a:t>
+            </a:r>
+            <a:endParaRPr kumimoji="1" lang="ja-JP" altLang="en-US">
+              <a:solidFill>
+                <a:sysClr val="windowText" lastClr="000000"/>
+              </a:solidFill>
+            </a:endParaRPr>
+          </a:p>
+        </p:txBody>
+      </p:sp>
+    </p:spTree>
+    <p:extLst>
+      <p:ext uri="{BB962C8B-B14F-4D97-AF65-F5344CB8AC3E}">
+        <p14:creationId xmlns:p14="http://schemas.microsoft.com/office/powerpoint/2010/main" val="413558758"/>
       </p:ext>
     </p:extLst>
   </p:cSld>

--- a/python/ex7/2412747_kadai7.pptx
+++ b/python/ex7/2412747_kadai7.pptx
@@ -261,7 +261,7 @@
           <a:p>
             <a:fld id="{94FE013F-E566-084D-8909-8EC0C9FFAC58}" type="datetimeFigureOut">
               <a:rPr kumimoji="1" lang="ja-JP" altLang="en-US" smtClean="0"/>
-              <a:t>2026/5/29</a:t>
+              <a:t>2026/6/18</a:t>
             </a:fld>
             <a:endParaRPr kumimoji="1" lang="ja-JP" altLang="en-US"/>
           </a:p>
@@ -491,7 +491,7 @@
           <a:p>
             <a:fld id="{94FE013F-E566-084D-8909-8EC0C9FFAC58}" type="datetimeFigureOut">
               <a:rPr kumimoji="1" lang="ja-JP" altLang="en-US" smtClean="0"/>
-              <a:t>2026/5/29</a:t>
+              <a:t>2026/6/18</a:t>
             </a:fld>
             <a:endParaRPr kumimoji="1" lang="ja-JP" altLang="en-US"/>
           </a:p>
@@ -731,7 +731,7 @@
           <a:p>
             <a:fld id="{94FE013F-E566-084D-8909-8EC0C9FFAC58}" type="datetimeFigureOut">
               <a:rPr kumimoji="1" lang="ja-JP" altLang="en-US" smtClean="0"/>
-              <a:t>2026/5/29</a:t>
+              <a:t>2026/6/18</a:t>
             </a:fld>
             <a:endParaRPr kumimoji="1" lang="ja-JP" altLang="en-US"/>
           </a:p>
@@ -961,7 +961,7 @@
           <a:p>
             <a:fld id="{94FE013F-E566-084D-8909-8EC0C9FFAC58}" type="datetimeFigureOut">
               <a:rPr kumimoji="1" lang="ja-JP" altLang="en-US" smtClean="0"/>
-              <a:t>2026/5/29</a:t>
+              <a:t>2026/6/18</a:t>
             </a:fld>
             <a:endParaRPr kumimoji="1" lang="ja-JP" altLang="en-US"/>
           </a:p>
@@ -1236,7 +1236,7 @@
           <a:p>
             <a:fld id="{94FE013F-E566-084D-8909-8EC0C9FFAC58}" type="datetimeFigureOut">
               <a:rPr kumimoji="1" lang="ja-JP" altLang="en-US" smtClean="0"/>
-              <a:t>2026/5/29</a:t>
+              <a:t>2026/6/18</a:t>
             </a:fld>
             <a:endParaRPr kumimoji="1" lang="ja-JP" altLang="en-US"/>
           </a:p>
@@ -1565,7 +1565,7 @@
           <a:p>
             <a:fld id="{94FE013F-E566-084D-8909-8EC0C9FFAC58}" type="datetimeFigureOut">
               <a:rPr kumimoji="1" lang="ja-JP" altLang="en-US" smtClean="0"/>
-              <a:t>2026/5/29</a:t>
+              <a:t>2026/6/18</a:t>
             </a:fld>
             <a:endParaRPr kumimoji="1" lang="ja-JP" altLang="en-US"/>
           </a:p>
@@ -2041,7 +2041,7 @@
           <a:p>
             <a:fld id="{94FE013F-E566-084D-8909-8EC0C9FFAC58}" type="datetimeFigureOut">
               <a:rPr kumimoji="1" lang="ja-JP" altLang="en-US" smtClean="0"/>
-              <a:t>2026/5/29</a:t>
+              <a:t>2026/6/18</a:t>
             </a:fld>
             <a:endParaRPr kumimoji="1" lang="ja-JP" altLang="en-US"/>
           </a:p>
@@ -2182,7 +2182,7 @@
           <a:p>
             <a:fld id="{94FE013F-E566-084D-8909-8EC0C9FFAC58}" type="datetimeFigureOut">
               <a:rPr kumimoji="1" lang="ja-JP" altLang="en-US" smtClean="0"/>
-              <a:t>2026/5/29</a:t>
+              <a:t>2026/6/18</a:t>
             </a:fld>
             <a:endParaRPr kumimoji="1" lang="ja-JP" altLang="en-US"/>
           </a:p>
@@ -2295,7 +2295,7 @@
           <a:p>
             <a:fld id="{94FE013F-E566-084D-8909-8EC0C9FFAC58}" type="datetimeFigureOut">
               <a:rPr kumimoji="1" lang="ja-JP" altLang="en-US" smtClean="0"/>
-              <a:t>2026/5/29</a:t>
+              <a:t>2026/6/18</a:t>
             </a:fld>
             <a:endParaRPr kumimoji="1" lang="ja-JP" altLang="en-US"/>
           </a:p>
@@ -2638,7 +2638,7 @@
           <a:p>
             <a:fld id="{94FE013F-E566-084D-8909-8EC0C9FFAC58}" type="datetimeFigureOut">
               <a:rPr kumimoji="1" lang="ja-JP" altLang="en-US" smtClean="0"/>
-              <a:t>2026/5/29</a:t>
+              <a:t>2026/6/18</a:t>
             </a:fld>
             <a:endParaRPr kumimoji="1" lang="ja-JP" altLang="en-US"/>
           </a:p>
@@ -2926,7 +2926,7 @@
           <a:p>
             <a:fld id="{94FE013F-E566-084D-8909-8EC0C9FFAC58}" type="datetimeFigureOut">
               <a:rPr kumimoji="1" lang="ja-JP" altLang="en-US" smtClean="0"/>
-              <a:t>2026/5/29</a:t>
+              <a:t>2026/6/18</a:t>
             </a:fld>
             <a:endParaRPr kumimoji="1" lang="ja-JP" altLang="en-US"/>
           </a:p>
@@ -3199,7 +3199,7 @@
           <a:p>
             <a:fld id="{94FE013F-E566-084D-8909-8EC0C9FFAC58}" type="datetimeFigureOut">
               <a:rPr kumimoji="1" lang="ja-JP" altLang="en-US" smtClean="0"/>
-              <a:t>2026/5/29</a:t>
+              <a:t>2026/6/18</a:t>
             </a:fld>
             <a:endParaRPr kumimoji="1" lang="ja-JP" altLang="en-US"/>
           </a:p>
@@ -4958,6 +4958,183 @@
           </a:p>
         </p:txBody>
       </p:sp>
+      <p:sp>
+        <p:nvSpPr>
+          <p:cNvPr id="8" name="正方形/長方形 7">
+            <a:extLst>
+              <a:ext uri="{FF2B5EF4-FFF2-40B4-BE49-F238E27FC236}">
+                <a16:creationId xmlns:a16="http://schemas.microsoft.com/office/drawing/2014/main" id="{6D234971-BEE6-9BFE-EB3C-5DD6B90866AF}"/>
+              </a:ext>
+            </a:extLst>
+          </p:cNvPr>
+          <p:cNvSpPr/>
+          <p:nvPr/>
+        </p:nvSpPr>
+        <p:spPr>
+          <a:xfrm>
+            <a:off x="7460343" y="1629910"/>
+            <a:ext cx="3893457" cy="1378857"/>
+          </a:xfrm>
+          <a:prstGeom prst="rect">
+            <a:avLst/>
+          </a:prstGeom>
+          <a:solidFill>
+            <a:schemeClr val="accent2">
+              <a:lumMod val="60000"/>
+              <a:lumOff val="40000"/>
+            </a:schemeClr>
+          </a:solidFill>
+        </p:spPr>
+        <p:style>
+          <a:lnRef idx="2">
+            <a:schemeClr val="accent1">
+              <a:shade val="15000"/>
+            </a:schemeClr>
+          </a:lnRef>
+          <a:fillRef idx="1">
+            <a:schemeClr val="accent1"/>
+          </a:fillRef>
+          <a:effectRef idx="0">
+            <a:schemeClr val="accent1"/>
+          </a:effectRef>
+          <a:fontRef idx="minor">
+            <a:schemeClr val="lt1"/>
+          </a:fontRef>
+        </p:style>
+        <p:txBody>
+          <a:bodyPr rtlCol="0" anchor="ctr"/>
+          <a:lstStyle/>
+          <a:p>
+            <a:pPr algn="ctr"/>
+            <a:r>
+              <a:rPr kumimoji="1" lang="ja-JP" altLang="en-US">
+                <a:solidFill>
+                  <a:sysClr val="windowText" lastClr="000000"/>
+                </a:solidFill>
+              </a:rPr>
+              <a:t>重心だけ追えば良い！</a:t>
+            </a:r>
+          </a:p>
+        </p:txBody>
+      </p:sp>
+      <p:sp>
+        <p:nvSpPr>
+          <p:cNvPr id="9" name="テキスト ボックス 8">
+            <a:extLst>
+              <a:ext uri="{FF2B5EF4-FFF2-40B4-BE49-F238E27FC236}">
+                <a16:creationId xmlns:a16="http://schemas.microsoft.com/office/drawing/2014/main" id="{D0B9C602-5172-CCA5-58E8-9C48AD7A9DFD}"/>
+              </a:ext>
+            </a:extLst>
+          </p:cNvPr>
+          <p:cNvSpPr txBox="1"/>
+          <p:nvPr/>
+        </p:nvSpPr>
+        <p:spPr>
+          <a:xfrm>
+            <a:off x="2520950" y="4273552"/>
+            <a:ext cx="6726521" cy="1200329"/>
+          </a:xfrm>
+          <a:prstGeom prst="rect">
+            <a:avLst/>
+          </a:prstGeom>
+          <a:noFill/>
+        </p:spPr>
+        <p:txBody>
+          <a:bodyPr wrap="none" rtlCol="0">
+            <a:spAutoFit/>
+          </a:bodyPr>
+          <a:lstStyle/>
+          <a:p>
+            <a:r>
+              <a:rPr lang="ja-JP" altLang="en-US"/>
+              <a:t>前のフレームとの重心の位置を比較</a:t>
+            </a:r>
+            <a:endParaRPr lang="en-US" altLang="ja-JP" dirty="0"/>
+          </a:p>
+          <a:p>
+            <a:r>
+              <a:rPr kumimoji="1" lang="ja-JP" altLang="en-US"/>
+              <a:t>一定の変化量があったら動いたと判定！</a:t>
+            </a:r>
+            <a:endParaRPr kumimoji="1" lang="en-US" altLang="ja-JP" dirty="0"/>
+          </a:p>
+          <a:p>
+            <a:r>
+              <a:rPr lang="ja-JP" altLang="en-US"/>
+              <a:t>・横の動きが大きい、</a:t>
+            </a:r>
+            <a:r>
+              <a:rPr lang="en-US" altLang="ja-JP" dirty="0"/>
+              <a:t>dx&gt;0</a:t>
+            </a:r>
+            <a:r>
+              <a:rPr lang="ja-JP" altLang="en-US"/>
+              <a:t>なら「右」でそうでなければ「左」</a:t>
+            </a:r>
+            <a:endParaRPr lang="en-US" altLang="ja-JP" dirty="0"/>
+          </a:p>
+          <a:p>
+            <a:r>
+              <a:rPr kumimoji="1" lang="ja-JP" altLang="en-US"/>
+              <a:t>・縦の動きが大きい、</a:t>
+            </a:r>
+            <a:r>
+              <a:rPr kumimoji="1" lang="en-US" altLang="ja-JP" dirty="0" err="1"/>
+              <a:t>dy</a:t>
+            </a:r>
+            <a:r>
+              <a:rPr kumimoji="1" lang="en-US" altLang="ja-JP" dirty="0"/>
+              <a:t>&gt;0</a:t>
+            </a:r>
+            <a:r>
+              <a:rPr kumimoji="1" lang="ja-JP" altLang="en-US"/>
+              <a:t>なら「下」でそうでなければ「上」</a:t>
+            </a:r>
+            <a:endParaRPr kumimoji="1" lang="en-US" altLang="ja-JP" dirty="0"/>
+          </a:p>
+        </p:txBody>
+      </p:sp>
+      <p:cxnSp>
+        <p:nvCxnSpPr>
+          <p:cNvPr id="6" name="曲線コネクタ 5">
+            <a:extLst>
+              <a:ext uri="{FF2B5EF4-FFF2-40B4-BE49-F238E27FC236}">
+                <a16:creationId xmlns:a16="http://schemas.microsoft.com/office/drawing/2014/main" id="{919332B5-38E5-114E-237C-BBFFC7C98255}"/>
+              </a:ext>
+            </a:extLst>
+          </p:cNvPr>
+          <p:cNvCxnSpPr>
+            <a:cxnSpLocks/>
+          </p:cNvCxnSpPr>
+          <p:nvPr/>
+        </p:nvCxnSpPr>
+        <p:spPr>
+          <a:xfrm>
+            <a:off x="3730171" y="1803627"/>
+            <a:ext cx="3855485" cy="759269"/>
+          </a:xfrm>
+          <a:prstGeom prst="curvedConnector3">
+            <a:avLst/>
+          </a:prstGeom>
+          <a:ln>
+            <a:tailEnd type="triangle"/>
+          </a:ln>
+        </p:spPr>
+        <p:style>
+          <a:lnRef idx="2">
+            <a:schemeClr val="accent1"/>
+          </a:lnRef>
+          <a:fillRef idx="0">
+            <a:schemeClr val="accent1"/>
+          </a:fillRef>
+          <a:effectRef idx="1">
+            <a:schemeClr val="accent1"/>
+          </a:effectRef>
+          <a:fontRef idx="minor">
+            <a:schemeClr val="tx1"/>
+          </a:fontRef>
+        </p:style>
+      </p:cxnSp>
     </p:spTree>
     <p:extLst>
       <p:ext uri="{BB962C8B-B14F-4D97-AF65-F5344CB8AC3E}">
